--- a/Aulas/Aula2/Aula02_Python_Parte1.pptx
+++ b/Aulas/Aula2/Aula02_Python_Parte1.pptx
@@ -7707,54 +7707,6 @@
           </a:prstGeom>
         </p:spPr>
       </p:pic>
-      <p:sp>
-        <p:nvSpPr>
-          <p:cNvPr id="2" name="TextBox 1">
-            <a:extLst>
-              <a:ext uri="{FF2B5EF4-FFF2-40B4-BE49-F238E27FC236}">
-                <a16:creationId xmlns:a16="http://schemas.microsoft.com/office/drawing/2014/main" id="{7409B8EE-C630-405B-8941-C63E3D5DE1D1}"/>
-              </a:ext>
-            </a:extLst>
-          </p:cNvPr>
-          <p:cNvSpPr txBox="1"/>
-          <p:nvPr/>
-        </p:nvSpPr>
-        <p:spPr>
-          <a:xfrm>
-            <a:off x="2180492" y="6361074"/>
-            <a:ext cx="8875635" cy="646331"/>
-          </a:xfrm>
-          <a:prstGeom prst="rect">
-            <a:avLst/>
-          </a:prstGeom>
-          <a:noFill/>
-        </p:spPr>
-        <p:txBody>
-          <a:bodyPr wrap="none" rtlCol="0">
-            <a:spAutoFit/>
-          </a:bodyPr>
-          <a:lstStyle/>
-          <a:p>
-            <a:pPr algn="ctr"/>
-            <a:r>
-              <a:rPr lang="pt-BR" dirty="0"/>
-              <a:t>Resolução dos Exercícios da Aula 1 </a:t>
-            </a:r>
-            <a:endParaRPr lang="pt-BR" dirty="0">
-              <a:hlinkClick r:id="rId5"/>
-            </a:endParaRPr>
-          </a:p>
-          <a:p>
-            <a:r>
-              <a:rPr lang="pt-BR" dirty="0">
-                <a:hlinkClick r:id="rId5"/>
-              </a:rPr>
-              <a:t>https://drive.google.com/file/d/16mpT4kJeVPvn8TlPX3zK5bX0SPNMsnDa/view?usp=sharing</a:t>
-            </a:r>
-            <a:endParaRPr lang="pt-BR" dirty="0"/>
-          </a:p>
-        </p:txBody>
-      </p:sp>
     </p:spTree>
   </p:cSld>
   <p:clrMapOvr>
